--- a/9_Deck/DigitalTwin_Round2_Pitch.pptx
+++ b/9_Deck/DigitalTwin_Round2_Pitch.pptx
@@ -11409,7 +11409,7 @@
         <p:spPr>
           <a:xfrm>
             <a:off x="640080" y="3063240"/>
-            <a:ext cx="3657600" cy="1371600"/>
+            <a:ext cx="3520440" cy="1371600"/>
           </a:xfrm>
           <a:prstGeom prst="rect">
             <a:avLst/>
@@ -11499,7 +11499,7 @@
         <p:spPr>
           <a:xfrm>
             <a:off x="841247" y="3209544"/>
-            <a:ext cx="3291840" cy="548640"/>
+            <a:ext cx="3154680" cy="548640"/>
           </a:xfrm>
           <a:prstGeom prst="rect">
             <a:avLst/>
@@ -11514,7 +11514,7 @@
           <a:p>
             <a:pPr algn="l"/>
             <a:r>
-              <a:rPr sz="3600" b="1">
+              <a:rPr sz="3200" b="1">
                 <a:solidFill>
                   <a:srgbClr val="1C5D99"/>
                 </a:solidFill>
@@ -11534,7 +11534,7 @@
         <p:spPr>
           <a:xfrm>
             <a:off x="841247" y="3813048"/>
-            <a:ext cx="3291840" cy="548640"/>
+            <a:ext cx="3154680" cy="548640"/>
           </a:xfrm>
           <a:prstGeom prst="rect">
             <a:avLst/>
@@ -11559,7 +11559,7 @@
                 </a:solidFill>
                 <a:latin typeface="Calibri"/>
               </a:rPr>
-              <a:t>of all forming-bottleneck warnings name a station</a:t>
+              <a:t>of all forming-bottleneck warnings name a</a:t>
             </a:r>
           </a:p>
           <a:p>
@@ -11575,21 +11575,127 @@
                 </a:solidFill>
                 <a:latin typeface="Calibri"/>
               </a:rPr>
-              <a:t>with zero instrumentation   [15.0–15.9], n=29,060</a:t>
-            </a:r>
-          </a:p>
-        </p:txBody>
-      </p:sp>
-      <p:sp>
-        <p:nvSpPr>
-          <p:cNvPr id="29" name="TextBox 28"/>
+              <a:t>station with zero instrumentation   [15.0–15.9]</a:t>
+            </a:r>
+          </a:p>
+          <a:p>
+            <a:pPr algn="l">
+              <a:lnSpc>
+                <a:spcPct val="115000"/>
+              </a:lnSpc>
+            </a:pPr>
+            <a:r>
+              <a:rPr sz="1050" b="0">
+                <a:solidFill>
+                  <a:srgbClr val="5A6067"/>
+                </a:solidFill>
+                <a:latin typeface="Calibri"/>
+              </a:rPr>
+              <a:t>n=29,060</a:t>
+            </a:r>
+          </a:p>
+        </p:txBody>
+      </p:sp>
+      <p:sp>
+        <p:nvSpPr>
+          <p:cNvPr id="29" name="Rectangle 28"/>
+          <p:cNvSpPr/>
+          <p:nvPr/>
+        </p:nvSpPr>
+        <p:spPr>
+          <a:xfrm>
+            <a:off x="4343400" y="3063240"/>
+            <a:ext cx="3520440" cy="1371600"/>
+          </a:xfrm>
+          <a:prstGeom prst="rect">
+            <a:avLst/>
+          </a:prstGeom>
+          <a:solidFill>
+            <a:srgbClr val="FFFFFF"/>
+          </a:solidFill>
+          <a:ln w="9525">
+            <a:solidFill>
+              <a:srgbClr val="C3CBD2"/>
+            </a:solidFill>
+          </a:ln>
+          <a:effectLst/>
+        </p:spPr>
+        <p:style>
+          <a:lnRef idx="1">
+            <a:schemeClr val="accent1"/>
+          </a:lnRef>
+          <a:fillRef idx="3">
+            <a:schemeClr val="accent1"/>
+          </a:fillRef>
+          <a:effectRef idx="2">
+            <a:schemeClr val="accent1"/>
+          </a:effectRef>
+          <a:fontRef idx="minor">
+            <a:schemeClr val="lt1"/>
+          </a:fontRef>
+        </p:style>
+        <p:txBody>
+          <a:bodyPr rtlCol="0" anchor="ctr"/>
+          <a:lstStyle/>
+          <a:p>
+            <a:pPr algn="ctr"/>
+          </a:p>
+        </p:txBody>
+      </p:sp>
+      <p:sp>
+        <p:nvSpPr>
+          <p:cNvPr id="30" name="Rectangle 29"/>
+          <p:cNvSpPr/>
+          <p:nvPr/>
+        </p:nvSpPr>
+        <p:spPr>
+          <a:xfrm>
+            <a:off x="4343400" y="3063240"/>
+            <a:ext cx="50292" cy="1371600"/>
+          </a:xfrm>
+          <a:prstGeom prst="rect">
+            <a:avLst/>
+          </a:prstGeom>
+          <a:solidFill>
+            <a:srgbClr val="B3261E"/>
+          </a:solidFill>
+          <a:ln>
+            <a:noFill/>
+          </a:ln>
+          <a:effectLst/>
+        </p:spPr>
+        <p:style>
+          <a:lnRef idx="1">
+            <a:schemeClr val="accent1"/>
+          </a:lnRef>
+          <a:fillRef idx="3">
+            <a:schemeClr val="accent1"/>
+          </a:fillRef>
+          <a:effectRef idx="2">
+            <a:schemeClr val="accent1"/>
+          </a:effectRef>
+          <a:fontRef idx="minor">
+            <a:schemeClr val="lt1"/>
+          </a:fontRef>
+        </p:style>
+        <p:txBody>
+          <a:bodyPr rtlCol="0" anchor="ctr"/>
+          <a:lstStyle/>
+          <a:p>
+            <a:pPr algn="ctr"/>
+          </a:p>
+        </p:txBody>
+      </p:sp>
+      <p:sp>
+        <p:nvSpPr>
+          <p:cNvPr id="31" name="TextBox 30"/>
           <p:cNvSpPr txBox="1"/>
           <p:nvPr/>
         </p:nvSpPr>
         <p:spPr>
           <a:xfrm>
-            <a:off x="4617720" y="3127248"/>
-            <a:ext cx="6949440" cy="2011680"/>
+            <a:off x="4544568" y="3209544"/>
+            <a:ext cx="3154680" cy="548640"/>
           </a:xfrm>
           <a:prstGeom prst="rect">
             <a:avLst/>
@@ -11602,99 +11708,292 @@
           </a:bodyPr>
           <a:lstStyle/>
           <a:p>
+            <a:pPr algn="l"/>
+            <a:r>
+              <a:rPr sz="3200" b="1">
+                <a:solidFill>
+                  <a:srgbClr val="B3261E"/>
+                </a:solidFill>
+                <a:latin typeface="Consolas"/>
+              </a:rPr>
+              <a:t>2.76%</a:t>
+            </a:r>
+          </a:p>
+        </p:txBody>
+      </p:sp>
+      <p:sp>
+        <p:nvSpPr>
+          <p:cNvPr id="32" name="TextBox 31"/>
+          <p:cNvSpPr txBox="1"/>
+          <p:nvPr/>
+        </p:nvSpPr>
+        <p:spPr>
+          <a:xfrm>
+            <a:off x="4544568" y="3813048"/>
+            <a:ext cx="3154680" cy="548640"/>
+          </a:xfrm>
+          <a:prstGeom prst="rect">
+            <a:avLst/>
+          </a:prstGeom>
+          <a:noFill/>
+        </p:spPr>
+        <p:txBody>
+          <a:bodyPr wrap="square" lIns="0" rIns="0" tIns="0" bIns="0">
+            <a:spAutoFit/>
+          </a:bodyPr>
+          <a:lstStyle/>
+          <a:p>
             <a:pPr algn="l">
               <a:lnSpc>
-                <a:spcPct val="135000"/>
+                <a:spcPct val="115000"/>
               </a:lnSpc>
             </a:pPr>
             <a:r>
-              <a:rPr sz="1350" b="0">
-                <a:solidFill>
-                  <a:srgbClr val="1B1E21"/>
-                </a:solidFill>
-                <a:latin typeface="Calibri"/>
-              </a:rPr>
-              <a:t>A dark station emits no scans and no states. It is recovered from the buffer slope either side —</a:t>
+              <a:rPr sz="1050" b="0">
+                <a:solidFill>
+                  <a:srgbClr val="5A6067"/>
+                </a:solidFill>
+                <a:latin typeface="Calibri"/>
+              </a:rPr>
+              <a:t>of vehicles a manual checklist PASSED</a:t>
             </a:r>
           </a:p>
           <a:p>
             <a:pPr algn="l">
               <a:lnSpc>
-                <a:spcPct val="135000"/>
+                <a:spcPct val="115000"/>
               </a:lnSpc>
             </a:pPr>
             <a:r>
-              <a:rPr sz="1350" b="0">
-                <a:solidFill>
-                  <a:srgbClr val="1B1E21"/>
-                </a:solidFill>
-                <a:latin typeface="Calibri"/>
-              </a:rPr>
-              <a:t>and that is free: the sensors are already there, on its neighbours.</a:t>
+              <a:rPr sz="1050" b="0">
+                <a:solidFill>
+                  <a:srgbClr val="5A6067"/>
+                </a:solidFill>
+                <a:latin typeface="Calibri"/>
+              </a:rPr>
+              <a:t>went on to fail end-of-line   ·   96.51% pass rate</a:t>
             </a:r>
           </a:p>
           <a:p>
             <a:pPr algn="l">
               <a:lnSpc>
-                <a:spcPct val="135000"/>
+                <a:spcPct val="115000"/>
               </a:lnSpc>
             </a:pPr>
             <a:r>
-              <a:rPr sz="1350" b="0">
-                <a:solidFill>
-                  <a:srgbClr val="1B1E21"/>
-                </a:solidFill>
-                <a:latin typeface="Calibri"/>
-              </a:rPr>
-              <a:t/>
-            </a:r>
-          </a:p>
+              <a:rPr sz="1050" b="0">
+                <a:solidFill>
+                  <a:srgbClr val="5A6067"/>
+                </a:solidFill>
+                <a:latin typeface="Calibri"/>
+              </a:rPr>
+              <a:t>n=31,329 checklist entries</a:t>
+            </a:r>
+          </a:p>
+        </p:txBody>
+      </p:sp>
+      <p:sp>
+        <p:nvSpPr>
+          <p:cNvPr id="33" name="TextBox 32"/>
+          <p:cNvSpPr txBox="1"/>
+          <p:nvPr/>
+        </p:nvSpPr>
+        <p:spPr>
+          <a:xfrm>
+            <a:off x="8046720" y="3127248"/>
+            <a:ext cx="3520440" cy="2011680"/>
+          </a:xfrm>
+          <a:prstGeom prst="rect">
+            <a:avLst/>
+          </a:prstGeom>
+          <a:noFill/>
+        </p:spPr>
+        <p:txBody>
+          <a:bodyPr wrap="square" lIns="0" rIns="0" tIns="0" bIns="0">
+            <a:spAutoFit/>
+          </a:bodyPr>
+          <a:lstStyle/>
           <a:p>
             <a:pPr algn="l">
               <a:lnSpc>
-                <a:spcPct val="135000"/>
+                <a:spcPct val="130000"/>
               </a:lnSpc>
             </a:pPr>
             <a:r>
-              <a:rPr sz="1350" b="0">
-                <a:solidFill>
-                  <a:srgbClr val="1B1E21"/>
-                </a:solidFill>
-                <a:latin typeface="Calibri"/>
-              </a:rPr>
-              <a:t>Manual checklists enter as a fourth data tier — attested — carrying the entry latency, because a human</a:t>
+              <a:rPr sz="1300" b="1">
+                <a:solidFill>
+                  <a:srgbClr val="2D6A4F"/>
+                </a:solidFill>
+                <a:latin typeface="Calibri"/>
+              </a:rPr>
+              <a:t>Body + final assembly:</a:t>
             </a:r>
           </a:p>
           <a:p>
             <a:pPr algn="l">
               <a:lnSpc>
-                <a:spcPct val="135000"/>
+                <a:spcPct val="130000"/>
               </a:lnSpc>
             </a:pPr>
             <a:r>
-              <a:rPr sz="1350" b="0">
-                <a:solidFill>
-                  <a:srgbClr val="1B1E21"/>
-                </a:solidFill>
-                <a:latin typeface="Calibri"/>
-              </a:rPr>
-              <a:t>record does not exist for the twin until someone types it in. A checklist that always reads OK is</a:t>
+              <a:rPr sz="1300" b="1">
+                <a:solidFill>
+                  <a:srgbClr val="2D6A4F"/>
+                </a:solidFill>
+                <a:latin typeface="Calibri"/>
+              </a:rPr>
+              <a:t>75.3% instrumented,</a:t>
             </a:r>
           </a:p>
           <a:p>
             <a:pPr algn="l">
               <a:lnSpc>
-                <a:spcPct val="135000"/>
+                <a:spcPct val="130000"/>
               </a:lnSpc>
             </a:pPr>
             <a:r>
-              <a:rPr sz="1350" b="0">
-                <a:solidFill>
-                  <a:srgbClr val="1B1E21"/>
-                </a:solidFill>
-                <a:latin typeface="Calibri"/>
-              </a:rPr>
-              <a:t>measuring compliance with the checklist, not quality.</a:t>
+              <a:rPr sz="1300" b="1">
+                <a:solidFill>
+                  <a:srgbClr val="2D6A4F"/>
+                </a:solidFill>
+                <a:latin typeface="Calibri"/>
+              </a:rPr>
+              <a:t>24.7% on manual checks —</a:t>
+            </a:r>
+          </a:p>
+          <a:p>
+            <a:pPr algn="l">
+              <a:lnSpc>
+                <a:spcPct val="130000"/>
+              </a:lnSpc>
+            </a:pPr>
+            <a:r>
+              <a:rPr sz="1300" b="1">
+                <a:solidFill>
+                  <a:srgbClr val="2D6A4F"/>
+                </a:solidFill>
+                <a:latin typeface="Calibri"/>
+              </a:rPr>
+              <a:t>an exact match to the</a:t>
+            </a:r>
+          </a:p>
+          <a:p>
+            <a:pPr algn="l">
+              <a:lnSpc>
+                <a:spcPct val="130000"/>
+              </a:lnSpc>
+            </a:pPr>
+            <a:r>
+              <a:rPr sz="1300" b="1">
+                <a:solidFill>
+                  <a:srgbClr val="2D6A4F"/>
+                </a:solidFill>
+                <a:latin typeface="Calibri"/>
+              </a:rPr>
+              <a:t>brief's own reference</a:t>
+            </a:r>
+          </a:p>
+          <a:p>
+            <a:pPr algn="l">
+              <a:lnSpc>
+                <a:spcPct val="130000"/>
+              </a:lnSpc>
+            </a:pPr>
+            <a:r>
+              <a:rPr sz="1300" b="1">
+                <a:solidFill>
+                  <a:srgbClr val="2D6A4F"/>
+                </a:solidFill>
+                <a:latin typeface="Calibri"/>
+              </a:rPr>
+              <a:t>parameters.</a:t>
+            </a:r>
+          </a:p>
+        </p:txBody>
+      </p:sp>
+      <p:sp>
+        <p:nvSpPr>
+          <p:cNvPr id="34" name="TextBox 33"/>
+          <p:cNvSpPr txBox="1"/>
+          <p:nvPr/>
+        </p:nvSpPr>
+        <p:spPr>
+          <a:xfrm>
+            <a:off x="640080" y="4709160"/>
+            <a:ext cx="10908792" cy="960120"/>
+          </a:xfrm>
+          <a:prstGeom prst="rect">
+            <a:avLst/>
+          </a:prstGeom>
+          <a:noFill/>
+        </p:spPr>
+        <p:txBody>
+          <a:bodyPr wrap="square" lIns="0" rIns="0" tIns="0" bIns="0">
+            <a:spAutoFit/>
+          </a:bodyPr>
+          <a:lstStyle/>
+          <a:p>
+            <a:pPr algn="l">
+              <a:lnSpc>
+                <a:spcPct val="132000"/>
+              </a:lnSpc>
+            </a:pPr>
+            <a:r>
+              <a:rPr sz="1250" b="0">
+                <a:solidFill>
+                  <a:srgbClr val="5A6067"/>
+                </a:solidFill>
+                <a:latin typeface="Calibri"/>
+              </a:rPr>
+              <a:t>A checklist reading near-100% against a non-zero EOL failure rate is measuring compliance with the checklist,</a:t>
+            </a:r>
+          </a:p>
+          <a:p>
+            <a:pPr algn="l">
+              <a:lnSpc>
+                <a:spcPct val="132000"/>
+              </a:lnSpc>
+            </a:pPr>
+            <a:r>
+              <a:rPr sz="1250" b="0">
+                <a:solidFill>
+                  <a:srgbClr val="5A6067"/>
+                </a:solidFill>
+                <a:latin typeface="Calibri"/>
+              </a:rPr>
+              <a:t>not quality — exactly what the design predicted, and structurally the same failure as our sensor_bias</a:t>
+            </a:r>
+          </a:p>
+          <a:p>
+            <a:pPr algn="l">
+              <a:lnSpc>
+                <a:spcPct val="132000"/>
+              </a:lnSpc>
+            </a:pPr>
+            <a:r>
+              <a:rPr sz="1250" b="0">
+                <a:solidFill>
+                  <a:srgbClr val="5A6067"/>
+                </a:solidFill>
+                <a:latin typeface="Calibri"/>
+              </a:rPr>
+              <a:t>tools: the instrument is the thing that is wrong. Manual checks enter as a fourth data tier — attested —</a:t>
+            </a:r>
+          </a:p>
+          <a:p>
+            <a:pPr algn="l">
+              <a:lnSpc>
+                <a:spcPct val="132000"/>
+              </a:lnSpc>
+            </a:pPr>
+            <a:r>
+              <a:rPr sz="1250" b="0">
+                <a:solidFill>
+                  <a:srgbClr val="5A6067"/>
+                </a:solidFill>
+                <a:latin typeface="Calibri"/>
+              </a:rPr>
+              <a:t>carrying the entry latency (mean 4.8 min), because a human record does not exist until someone types it in.</a:t>
             </a:r>
           </a:p>
         </p:txBody>

--- a/9_Deck/DigitalTwin_Round2_Pitch.pptx
+++ b/9_Deck/DigitalTwin_Round2_Pitch.pptx
@@ -5463,7 +5463,42 @@
       </p:sp>
       <p:sp>
         <p:nvSpPr>
-          <p:cNvPr id="4" name="Rectangle 3"/>
+          <p:cNvPr id="4" name="TextBox 3"/>
+          <p:cNvSpPr txBox="1"/>
+          <p:nvPr/>
+        </p:nvSpPr>
+        <p:spPr>
+          <a:xfrm>
+            <a:off x="640080" y="1517904"/>
+            <a:ext cx="10972800" cy="274320"/>
+          </a:xfrm>
+          <a:prstGeom prst="rect">
+            <a:avLst/>
+          </a:prstGeom>
+          <a:noFill/>
+        </p:spPr>
+        <p:txBody>
+          <a:bodyPr wrap="square" lIns="0" rIns="0" tIns="0" bIns="0">
+            <a:spAutoFit/>
+          </a:bodyPr>
+          <a:lstStyle/>
+          <a:p>
+            <a:pPr algn="l"/>
+            <a:r>
+              <a:rPr sz="1100" b="0">
+                <a:solidFill>
+                  <a:srgbClr val="5A6067"/>
+                </a:solidFill>
+                <a:latin typeface="Calibri"/>
+              </a:rPr>
+              <a:t>Reads seven tables the plant already produces — scans, PLC state tags, buffer counters, tool results, andon, rework, calendar. No new hardware on day one.</a:t>
+            </a:r>
+          </a:p>
+        </p:txBody>
+      </p:sp>
+      <p:sp>
+        <p:nvSpPr>
+          <p:cNvPr id="5" name="Rectangle 4"/>
           <p:cNvSpPr/>
           <p:nvPr/>
         </p:nvSpPr>
@@ -5509,7 +5544,7 @@
       </p:sp>
       <p:sp>
         <p:nvSpPr>
-          <p:cNvPr id="5" name="Rectangle 4"/>
+          <p:cNvPr id="6" name="Rectangle 5"/>
           <p:cNvSpPr/>
           <p:nvPr/>
         </p:nvSpPr>
@@ -5553,7 +5588,7 @@
       </p:sp>
       <p:sp>
         <p:nvSpPr>
-          <p:cNvPr id="6" name="TextBox 5"/>
+          <p:cNvPr id="7" name="TextBox 6"/>
           <p:cNvSpPr txBox="1"/>
           <p:nvPr/>
         </p:nvSpPr>
@@ -5588,7 +5623,7 @@
       </p:sp>
       <p:sp>
         <p:nvSpPr>
-          <p:cNvPr id="7" name="TextBox 6"/>
+          <p:cNvPr id="8" name="TextBox 7"/>
           <p:cNvSpPr txBox="1"/>
           <p:nvPr/>
         </p:nvSpPr>
@@ -5623,7 +5658,7 @@
       </p:sp>
       <p:sp>
         <p:nvSpPr>
-          <p:cNvPr id="8" name="TextBox 7"/>
+          <p:cNvPr id="9" name="TextBox 8"/>
           <p:cNvSpPr txBox="1"/>
           <p:nvPr/>
         </p:nvSpPr>
@@ -5658,7 +5693,7 @@
       </p:sp>
       <p:sp>
         <p:nvSpPr>
-          <p:cNvPr id="9" name="TextBox 8"/>
+          <p:cNvPr id="10" name="TextBox 9"/>
           <p:cNvSpPr txBox="1"/>
           <p:nvPr/>
         </p:nvSpPr>
@@ -5713,7 +5748,7 @@
       </p:sp>
       <p:sp>
         <p:nvSpPr>
-          <p:cNvPr id="10" name="Rectangle 9"/>
+          <p:cNvPr id="11" name="Rectangle 10"/>
           <p:cNvSpPr/>
           <p:nvPr/>
         </p:nvSpPr>
@@ -5759,7 +5794,7 @@
       </p:sp>
       <p:sp>
         <p:nvSpPr>
-          <p:cNvPr id="11" name="Rectangle 10"/>
+          <p:cNvPr id="12" name="Rectangle 11"/>
           <p:cNvSpPr/>
           <p:nvPr/>
         </p:nvSpPr>
@@ -5803,7 +5838,7 @@
       </p:sp>
       <p:sp>
         <p:nvSpPr>
-          <p:cNvPr id="12" name="TextBox 11"/>
+          <p:cNvPr id="13" name="TextBox 12"/>
           <p:cNvSpPr txBox="1"/>
           <p:nvPr/>
         </p:nvSpPr>
@@ -5838,7 +5873,7 @@
       </p:sp>
       <p:sp>
         <p:nvSpPr>
-          <p:cNvPr id="13" name="TextBox 12"/>
+          <p:cNvPr id="14" name="TextBox 13"/>
           <p:cNvSpPr txBox="1"/>
           <p:nvPr/>
         </p:nvSpPr>
@@ -5873,7 +5908,7 @@
       </p:sp>
       <p:sp>
         <p:nvSpPr>
-          <p:cNvPr id="14" name="TextBox 13"/>
+          <p:cNvPr id="15" name="TextBox 14"/>
           <p:cNvSpPr txBox="1"/>
           <p:nvPr/>
         </p:nvSpPr>
@@ -5908,7 +5943,7 @@
       </p:sp>
       <p:sp>
         <p:nvSpPr>
-          <p:cNvPr id="15" name="TextBox 14"/>
+          <p:cNvPr id="16" name="TextBox 15"/>
           <p:cNvSpPr txBox="1"/>
           <p:nvPr/>
         </p:nvSpPr>
@@ -5963,7 +5998,7 @@
       </p:sp>
       <p:sp>
         <p:nvSpPr>
-          <p:cNvPr id="16" name="Rectangle 15"/>
+          <p:cNvPr id="17" name="Rectangle 16"/>
           <p:cNvSpPr/>
           <p:nvPr/>
         </p:nvSpPr>
@@ -6009,7 +6044,7 @@
       </p:sp>
       <p:sp>
         <p:nvSpPr>
-          <p:cNvPr id="17" name="Rectangle 16"/>
+          <p:cNvPr id="18" name="Rectangle 17"/>
           <p:cNvSpPr/>
           <p:nvPr/>
         </p:nvSpPr>
@@ -6053,7 +6088,7 @@
       </p:sp>
       <p:sp>
         <p:nvSpPr>
-          <p:cNvPr id="18" name="TextBox 17"/>
+          <p:cNvPr id="19" name="TextBox 18"/>
           <p:cNvSpPr txBox="1"/>
           <p:nvPr/>
         </p:nvSpPr>
@@ -6088,7 +6123,7 @@
       </p:sp>
       <p:sp>
         <p:nvSpPr>
-          <p:cNvPr id="19" name="TextBox 18"/>
+          <p:cNvPr id="20" name="TextBox 19"/>
           <p:cNvSpPr txBox="1"/>
           <p:nvPr/>
         </p:nvSpPr>
@@ -6123,7 +6158,7 @@
       </p:sp>
       <p:sp>
         <p:nvSpPr>
-          <p:cNvPr id="20" name="TextBox 19"/>
+          <p:cNvPr id="21" name="TextBox 20"/>
           <p:cNvSpPr txBox="1"/>
           <p:nvPr/>
         </p:nvSpPr>
@@ -6158,7 +6193,7 @@
       </p:sp>
       <p:sp>
         <p:nvSpPr>
-          <p:cNvPr id="21" name="TextBox 20"/>
+          <p:cNvPr id="22" name="TextBox 21"/>
           <p:cNvSpPr txBox="1"/>
           <p:nvPr/>
         </p:nvSpPr>
@@ -6213,7 +6248,7 @@
       </p:sp>
       <p:sp>
         <p:nvSpPr>
-          <p:cNvPr id="22" name="Rectangle 21"/>
+          <p:cNvPr id="23" name="Rectangle 22"/>
           <p:cNvSpPr/>
           <p:nvPr/>
         </p:nvSpPr>
@@ -6259,7 +6294,7 @@
       </p:sp>
       <p:sp>
         <p:nvSpPr>
-          <p:cNvPr id="23" name="Rectangle 22"/>
+          <p:cNvPr id="24" name="Rectangle 23"/>
           <p:cNvSpPr/>
           <p:nvPr/>
         </p:nvSpPr>
@@ -6303,7 +6338,7 @@
       </p:sp>
       <p:sp>
         <p:nvSpPr>
-          <p:cNvPr id="24" name="TextBox 23"/>
+          <p:cNvPr id="25" name="TextBox 24"/>
           <p:cNvSpPr txBox="1"/>
           <p:nvPr/>
         </p:nvSpPr>
@@ -6338,7 +6373,7 @@
       </p:sp>
       <p:sp>
         <p:nvSpPr>
-          <p:cNvPr id="25" name="TextBox 24"/>
+          <p:cNvPr id="26" name="TextBox 25"/>
           <p:cNvSpPr txBox="1"/>
           <p:nvPr/>
         </p:nvSpPr>
@@ -6373,7 +6408,7 @@
       </p:sp>
       <p:sp>
         <p:nvSpPr>
-          <p:cNvPr id="26" name="TextBox 25"/>
+          <p:cNvPr id="27" name="TextBox 26"/>
           <p:cNvSpPr txBox="1"/>
           <p:nvPr/>
         </p:nvSpPr>
@@ -6408,7 +6443,7 @@
       </p:sp>
       <p:sp>
         <p:nvSpPr>
-          <p:cNvPr id="27" name="TextBox 26"/>
+          <p:cNvPr id="28" name="TextBox 27"/>
           <p:cNvSpPr txBox="1"/>
           <p:nvPr/>
         </p:nvSpPr>
@@ -6463,7 +6498,7 @@
       </p:sp>
       <p:sp>
         <p:nvSpPr>
-          <p:cNvPr id="28" name="Rectangle 27"/>
+          <p:cNvPr id="29" name="Rectangle 28"/>
           <p:cNvSpPr/>
           <p:nvPr/>
         </p:nvSpPr>
@@ -6509,7 +6544,7 @@
       </p:sp>
       <p:sp>
         <p:nvSpPr>
-          <p:cNvPr id="29" name="Rectangle 28"/>
+          <p:cNvPr id="30" name="Rectangle 29"/>
           <p:cNvSpPr/>
           <p:nvPr/>
         </p:nvSpPr>
@@ -6553,7 +6588,7 @@
       </p:sp>
       <p:sp>
         <p:nvSpPr>
-          <p:cNvPr id="30" name="TextBox 29"/>
+          <p:cNvPr id="31" name="TextBox 30"/>
           <p:cNvSpPr txBox="1"/>
           <p:nvPr/>
         </p:nvSpPr>
@@ -6588,7 +6623,7 @@
       </p:sp>
       <p:sp>
         <p:nvSpPr>
-          <p:cNvPr id="31" name="TextBox 30"/>
+          <p:cNvPr id="32" name="TextBox 31"/>
           <p:cNvSpPr txBox="1"/>
           <p:nvPr/>
         </p:nvSpPr>
@@ -6623,7 +6658,7 @@
       </p:sp>
       <p:sp>
         <p:nvSpPr>
-          <p:cNvPr id="32" name="TextBox 31"/>
+          <p:cNvPr id="33" name="TextBox 32"/>
           <p:cNvSpPr txBox="1"/>
           <p:nvPr/>
         </p:nvSpPr>
@@ -6658,7 +6693,7 @@
       </p:sp>
       <p:sp>
         <p:nvSpPr>
-          <p:cNvPr id="33" name="TextBox 32"/>
+          <p:cNvPr id="34" name="TextBox 33"/>
           <p:cNvSpPr txBox="1"/>
           <p:nvPr/>
         </p:nvSpPr>
@@ -6713,7 +6748,7 @@
       </p:sp>
       <p:sp>
         <p:nvSpPr>
-          <p:cNvPr id="34" name="Rectangle 33"/>
+          <p:cNvPr id="35" name="Rectangle 34"/>
           <p:cNvSpPr/>
           <p:nvPr/>
         </p:nvSpPr>
@@ -6759,7 +6794,7 @@
       </p:sp>
       <p:sp>
         <p:nvSpPr>
-          <p:cNvPr id="35" name="Rectangle 34"/>
+          <p:cNvPr id="36" name="Rectangle 35"/>
           <p:cNvSpPr/>
           <p:nvPr/>
         </p:nvSpPr>
@@ -6803,7 +6838,7 @@
       </p:sp>
       <p:sp>
         <p:nvSpPr>
-          <p:cNvPr id="36" name="TextBox 35"/>
+          <p:cNvPr id="37" name="TextBox 36"/>
           <p:cNvSpPr txBox="1"/>
           <p:nvPr/>
         </p:nvSpPr>
@@ -6831,21 +6866,21 @@
                 </a:solidFill>
                 <a:latin typeface="Calibri"/>
               </a:rPr>
-              <a:t>Never: closed-loop write to line control. The twin advises; a person decides.</a:t>
-            </a:r>
-          </a:p>
-        </p:txBody>
-      </p:sp>
-      <p:sp>
-        <p:nvSpPr>
-          <p:cNvPr id="37" name="TextBox 36"/>
+              <a:t>Never: closed-loop write to line control — enforced by a test, not a promise.</a:t>
+            </a:r>
+          </a:p>
+        </p:txBody>
+      </p:sp>
+      <p:sp>
+        <p:nvSpPr>
+          <p:cNvPr id="38" name="TextBox 37"/>
           <p:cNvSpPr txBox="1"/>
           <p:nvPr/>
         </p:nvSpPr>
         <p:spPr>
           <a:xfrm>
-            <a:off x="640080" y="5394960"/>
-            <a:ext cx="10972800" cy="685800"/>
+            <a:off x="640080" y="5285232"/>
+            <a:ext cx="10972800" cy="868680"/>
           </a:xfrm>
           <a:prstGeom prst="rect">
             <a:avLst/>
@@ -6887,6 +6922,22 @@
                 <a:latin typeface="Calibri"/>
               </a:rPr>
               <a:t>the person.  ·  equipment vintage — no data axis for it.  ·  a CONWIP lead-time figure — no source file, so it does not appear.</a:t>
+            </a:r>
+          </a:p>
+          <a:p>
+            <a:pPr algn="l">
+              <a:lnSpc>
+                <a:spcPct val="130000"/>
+              </a:lnSpc>
+            </a:pPr>
+            <a:r>
+              <a:rPr sz="1250" b="0">
+                <a:solidFill>
+                  <a:srgbClr val="5A6067"/>
+                </a:solidFill>
+                <a:latin typeface="Calibri"/>
+              </a:rPr>
+              <a:t>Not yet built:  the historian adapter. Shadow mode runs today on exported logs; one module connects it live.</a:t>
             </a:r>
           </a:p>
         </p:txBody>
